--- a/doc/Step1仕様書.pptx
+++ b/doc/Step1仕様書.pptx
@@ -262,7 +262,7 @@
           <a:p>
             <a:fld id="{94165FF4-FB7B-4546-AEDF-E8D6362B3E6C}" type="datetimeFigureOut">
               <a:rPr kumimoji="1" lang="ja-JP" altLang="en-US" smtClean="0"/>
-              <a:t>2026/5/30</a:t>
+              <a:t>2026/6/3</a:t>
             </a:fld>
             <a:endParaRPr kumimoji="1" lang="ja-JP" altLang="en-US"/>
           </a:p>
@@ -492,7 +492,7 @@
           <a:p>
             <a:fld id="{94165FF4-FB7B-4546-AEDF-E8D6362B3E6C}" type="datetimeFigureOut">
               <a:rPr kumimoji="1" lang="ja-JP" altLang="en-US" smtClean="0"/>
-              <a:t>2026/5/30</a:t>
+              <a:t>2026/6/3</a:t>
             </a:fld>
             <a:endParaRPr kumimoji="1" lang="ja-JP" altLang="en-US"/>
           </a:p>
@@ -732,7 +732,7 @@
           <a:p>
             <a:fld id="{94165FF4-FB7B-4546-AEDF-E8D6362B3E6C}" type="datetimeFigureOut">
               <a:rPr kumimoji="1" lang="ja-JP" altLang="en-US" smtClean="0"/>
-              <a:t>2026/5/30</a:t>
+              <a:t>2026/6/3</a:t>
             </a:fld>
             <a:endParaRPr kumimoji="1" lang="ja-JP" altLang="en-US"/>
           </a:p>
@@ -962,7 +962,7 @@
           <a:p>
             <a:fld id="{94165FF4-FB7B-4546-AEDF-E8D6362B3E6C}" type="datetimeFigureOut">
               <a:rPr kumimoji="1" lang="ja-JP" altLang="en-US" smtClean="0"/>
-              <a:t>2026/5/30</a:t>
+              <a:t>2026/6/3</a:t>
             </a:fld>
             <a:endParaRPr kumimoji="1" lang="ja-JP" altLang="en-US"/>
           </a:p>
@@ -1237,7 +1237,7 @@
           <a:p>
             <a:fld id="{94165FF4-FB7B-4546-AEDF-E8D6362B3E6C}" type="datetimeFigureOut">
               <a:rPr kumimoji="1" lang="ja-JP" altLang="en-US" smtClean="0"/>
-              <a:t>2026/5/30</a:t>
+              <a:t>2026/6/3</a:t>
             </a:fld>
             <a:endParaRPr kumimoji="1" lang="ja-JP" altLang="en-US"/>
           </a:p>
@@ -1566,7 +1566,7 @@
           <a:p>
             <a:fld id="{94165FF4-FB7B-4546-AEDF-E8D6362B3E6C}" type="datetimeFigureOut">
               <a:rPr kumimoji="1" lang="ja-JP" altLang="en-US" smtClean="0"/>
-              <a:t>2026/5/30</a:t>
+              <a:t>2026/6/3</a:t>
             </a:fld>
             <a:endParaRPr kumimoji="1" lang="ja-JP" altLang="en-US"/>
           </a:p>
@@ -2042,7 +2042,7 @@
           <a:p>
             <a:fld id="{94165FF4-FB7B-4546-AEDF-E8D6362B3E6C}" type="datetimeFigureOut">
               <a:rPr kumimoji="1" lang="ja-JP" altLang="en-US" smtClean="0"/>
-              <a:t>2026/5/30</a:t>
+              <a:t>2026/6/3</a:t>
             </a:fld>
             <a:endParaRPr kumimoji="1" lang="ja-JP" altLang="en-US"/>
           </a:p>
@@ -2183,7 +2183,7 @@
           <a:p>
             <a:fld id="{94165FF4-FB7B-4546-AEDF-E8D6362B3E6C}" type="datetimeFigureOut">
               <a:rPr kumimoji="1" lang="ja-JP" altLang="en-US" smtClean="0"/>
-              <a:t>2026/5/30</a:t>
+              <a:t>2026/6/3</a:t>
             </a:fld>
             <a:endParaRPr kumimoji="1" lang="ja-JP" altLang="en-US"/>
           </a:p>
@@ -2296,7 +2296,7 @@
           <a:p>
             <a:fld id="{94165FF4-FB7B-4546-AEDF-E8D6362B3E6C}" type="datetimeFigureOut">
               <a:rPr kumimoji="1" lang="ja-JP" altLang="en-US" smtClean="0"/>
-              <a:t>2026/5/30</a:t>
+              <a:t>2026/6/3</a:t>
             </a:fld>
             <a:endParaRPr kumimoji="1" lang="ja-JP" altLang="en-US"/>
           </a:p>
@@ -2639,7 +2639,7 @@
           <a:p>
             <a:fld id="{94165FF4-FB7B-4546-AEDF-E8D6362B3E6C}" type="datetimeFigureOut">
               <a:rPr kumimoji="1" lang="ja-JP" altLang="en-US" smtClean="0"/>
-              <a:t>2026/5/30</a:t>
+              <a:t>2026/6/3</a:t>
             </a:fld>
             <a:endParaRPr kumimoji="1" lang="ja-JP" altLang="en-US"/>
           </a:p>
@@ -2927,7 +2927,7 @@
           <a:p>
             <a:fld id="{94165FF4-FB7B-4546-AEDF-E8D6362B3E6C}" type="datetimeFigureOut">
               <a:rPr kumimoji="1" lang="ja-JP" altLang="en-US" smtClean="0"/>
-              <a:t>2026/5/30</a:t>
+              <a:t>2026/6/3</a:t>
             </a:fld>
             <a:endParaRPr kumimoji="1" lang="ja-JP" altLang="en-US"/>
           </a:p>
@@ -3200,7 +3200,7 @@
           <a:p>
             <a:fld id="{94165FF4-FB7B-4546-AEDF-E8D6362B3E6C}" type="datetimeFigureOut">
               <a:rPr kumimoji="1" lang="ja-JP" altLang="en-US" smtClean="0"/>
-              <a:t>2026/5/30</a:t>
+              <a:t>2026/6/3</a:t>
             </a:fld>
             <a:endParaRPr kumimoji="1" lang="ja-JP" altLang="en-US"/>
           </a:p>
@@ -7743,7 +7743,7 @@
         <p:spPr>
           <a:xfrm>
             <a:off x="1444427" y="2285647"/>
-            <a:ext cx="4559863" cy="1061829"/>
+            <a:ext cx="4559863" cy="1200329"/>
           </a:xfrm>
           <a:prstGeom prst="rect">
             <a:avLst/>
@@ -7796,7 +7796,7 @@
             </a:r>
             <a:r>
               <a:rPr lang="en-US" altLang="ja-JP" sz="900" dirty="0"/>
-              <a:t>NG</a:t>
+              <a:t>OK/NG</a:t>
             </a:r>
             <a:r>
               <a:rPr lang="ja-JP" altLang="en-US" sz="900" dirty="0"/>
@@ -7807,78 +7807,49 @@
           <a:p>
             <a:r>
               <a:rPr lang="ja-JP" altLang="en-US" sz="900" dirty="0"/>
-              <a:t>不良総数は再検査</a:t>
+              <a:t>再検査用の</a:t>
             </a:r>
             <a:r>
               <a:rPr lang="en-US" altLang="ja-JP" sz="900" dirty="0"/>
-              <a:t>NG</a:t>
+              <a:t>OK/NG</a:t>
             </a:r>
             <a:r>
               <a:rPr lang="ja-JP" altLang="en-US" sz="900" dirty="0"/>
-              <a:t>カウンタの合計数となる</a:t>
+              <a:t>カウンタが全て</a:t>
+            </a:r>
+            <a:r>
+              <a:rPr lang="en-US" altLang="ja-JP" sz="900" dirty="0"/>
+              <a:t>0</a:t>
+            </a:r>
+            <a:r>
+              <a:rPr lang="ja-JP" altLang="en-US" sz="900" dirty="0"/>
+              <a:t>の場合は再検査実施しなかったとする</a:t>
             </a:r>
             <a:endParaRPr lang="en-US" altLang="ja-JP" sz="900" dirty="0"/>
           </a:p>
           <a:p>
             <a:r>
               <a:rPr lang="ja-JP" altLang="en-US" sz="900" dirty="0"/>
-              <a:t>ただし、不良総数は自動計算ではなく、都度カウントとする</a:t>
+              <a:t>→その場合の不良総数は初回検査時の不良総数を採用する</a:t>
             </a:r>
             <a:endParaRPr lang="en-US" altLang="ja-JP" sz="900" dirty="0"/>
           </a:p>
           <a:p>
             <a:r>
+              <a:rPr lang="en-US" altLang="ja-JP" sz="900" dirty="0"/>
+              <a:t>※</a:t>
+            </a:r>
+            <a:r>
               <a:rPr lang="ja-JP" altLang="en-US" sz="900" dirty="0"/>
-              <a:t>（初回</a:t>
-            </a:r>
-            <a:r>
-              <a:rPr lang="en-US" altLang="ja-JP" sz="900" dirty="0"/>
-              <a:t>NG</a:t>
-            </a:r>
-            <a:r>
-              <a:rPr lang="ja-JP" altLang="en-US" sz="900" dirty="0"/>
-              <a:t>カウンタと再検査</a:t>
-            </a:r>
-            <a:r>
-              <a:rPr lang="en-US" altLang="ja-JP" sz="900" dirty="0"/>
-              <a:t>NG</a:t>
-            </a:r>
-            <a:r>
-              <a:rPr lang="ja-JP" altLang="en-US" sz="900" dirty="0"/>
-              <a:t>カウンタのどちらを集計するかが不明なため）</a:t>
+              <a:t>作業者はカウンタのリセット作業はしない</a:t>
             </a:r>
             <a:endParaRPr lang="en-US" altLang="ja-JP" sz="900" dirty="0"/>
           </a:p>
           <a:p>
-            <a:r>
-              <a:rPr lang="ja-JP" altLang="en-US" sz="900" dirty="0">
-                <a:solidFill>
-                  <a:srgbClr val="C00000"/>
-                </a:solidFill>
-              </a:rPr>
-              <a:t>＊</a:t>
-            </a:r>
-            <a:r>
-              <a:rPr lang="en-US" altLang="ja-JP" sz="900" dirty="0">
-                <a:solidFill>
-                  <a:srgbClr val="C00000"/>
-                </a:solidFill>
-              </a:rPr>
-              <a:t>NG</a:t>
-            </a:r>
-            <a:r>
-              <a:rPr lang="ja-JP" altLang="en-US" sz="900" dirty="0">
-                <a:solidFill>
-                  <a:srgbClr val="C00000"/>
-                </a:solidFill>
-              </a:rPr>
-              <a:t>品検査を実施しない場合や複数回実施する場合を検討しておく</a:t>
-            </a:r>
-            <a:endParaRPr lang="en-US" altLang="ja-JP" sz="900" dirty="0">
-              <a:solidFill>
-                <a:srgbClr val="C00000"/>
-              </a:solidFill>
-            </a:endParaRPr>
+            <a:endParaRPr lang="en-US" altLang="ja-JP" sz="900" dirty="0"/>
+          </a:p>
+          <a:p>
+            <a:endParaRPr lang="en-US" altLang="ja-JP" sz="900" dirty="0"/>
           </a:p>
         </p:txBody>
       </p:sp>
@@ -7982,7 +7953,7 @@
             </a:r>
             <a:r>
               <a:rPr lang="en-US" altLang="ja-JP" sz="900" dirty="0"/>
-              <a:t>NG</a:t>
+              <a:t>OK/NG</a:t>
             </a:r>
             <a:r>
               <a:rPr lang="ja-JP" altLang="en-US" sz="900" dirty="0"/>
@@ -8293,7 +8264,7 @@
                   <a:schemeClr val="tx1"/>
                 </a:solidFill>
               </a:rPr>
-              <a:t>：記録実行時に再検査モードはリセットしておく（ポカヨケ）</a:t>
+              <a:t>：記録実行時に再検査モードはリセットする（ポカヨケ）</a:t>
             </a:r>
             <a:endParaRPr lang="en-US" altLang="ja-JP" sz="900" dirty="0">
               <a:solidFill>
@@ -9030,6 +9001,46 @@
               <a:t>へバックアップする予定）</a:t>
             </a:r>
             <a:endParaRPr lang="en-US" altLang="ja-JP" sz="900" dirty="0"/>
+          </a:p>
+        </p:txBody>
+      </p:sp>
+      <p:sp>
+        <p:nvSpPr>
+          <p:cNvPr id="3" name="テキスト ボックス 2">
+            <a:extLst>
+              <a:ext uri="{FF2B5EF4-FFF2-40B4-BE49-F238E27FC236}">
+                <a16:creationId xmlns:a16="http://schemas.microsoft.com/office/drawing/2014/main" id="{A4BFCD26-5E02-06E9-33A5-8C71410CA848}"/>
+              </a:ext>
+            </a:extLst>
+          </p:cNvPr>
+          <p:cNvSpPr txBox="1"/>
+          <p:nvPr/>
+        </p:nvSpPr>
+        <p:spPr>
+          <a:xfrm>
+            <a:off x="10754315" y="162144"/>
+            <a:ext cx="1274398" cy="230832"/>
+          </a:xfrm>
+          <a:prstGeom prst="rect">
+            <a:avLst/>
+          </a:prstGeom>
+          <a:noFill/>
+        </p:spPr>
+        <p:txBody>
+          <a:bodyPr wrap="square">
+            <a:spAutoFit/>
+          </a:bodyPr>
+          <a:lstStyle/>
+          <a:p>
+            <a:pPr algn="r"/>
+            <a:r>
+              <a:rPr lang="ja-JP" altLang="en-US" sz="900" dirty="0"/>
+              <a:t>最終更新：</a:t>
+            </a:r>
+            <a:r>
+              <a:rPr lang="en-US" altLang="ja-JP" sz="900" dirty="0"/>
+              <a:t>2026.6.2</a:t>
+            </a:r>
           </a:p>
         </p:txBody>
       </p:sp>
